--- a/その他/ゲーム企画ジャム/ゲーム企画ジャム.pptx
+++ b/その他/ゲーム企画ジャム/ゲーム企画ジャム.pptx
@@ -263,7 +263,7 @@
           <a:p>
             <a:fld id="{E9CC885B-4903-4D54-9A93-00025F12DED9}" type="datetimeFigureOut">
               <a:rPr kumimoji="1" lang="ja-JP" altLang="en-US" smtClean="0"/>
-              <a:t>2025/4/30</a:t>
+              <a:t>2025/5/2</a:t>
             </a:fld>
             <a:endParaRPr kumimoji="1" lang="ja-JP" altLang="en-US"/>
           </a:p>
@@ -493,7 +493,7 @@
           <a:p>
             <a:fld id="{E9CC885B-4903-4D54-9A93-00025F12DED9}" type="datetimeFigureOut">
               <a:rPr kumimoji="1" lang="ja-JP" altLang="en-US" smtClean="0"/>
-              <a:t>2025/4/30</a:t>
+              <a:t>2025/5/2</a:t>
             </a:fld>
             <a:endParaRPr kumimoji="1" lang="ja-JP" altLang="en-US"/>
           </a:p>
@@ -733,7 +733,7 @@
           <a:p>
             <a:fld id="{E9CC885B-4903-4D54-9A93-00025F12DED9}" type="datetimeFigureOut">
               <a:rPr kumimoji="1" lang="ja-JP" altLang="en-US" smtClean="0"/>
-              <a:t>2025/4/30</a:t>
+              <a:t>2025/5/2</a:t>
             </a:fld>
             <a:endParaRPr kumimoji="1" lang="ja-JP" altLang="en-US"/>
           </a:p>
@@ -963,7 +963,7 @@
           <a:p>
             <a:fld id="{E9CC885B-4903-4D54-9A93-00025F12DED9}" type="datetimeFigureOut">
               <a:rPr kumimoji="1" lang="ja-JP" altLang="en-US" smtClean="0"/>
-              <a:t>2025/4/30</a:t>
+              <a:t>2025/5/2</a:t>
             </a:fld>
             <a:endParaRPr kumimoji="1" lang="ja-JP" altLang="en-US"/>
           </a:p>
@@ -1238,7 +1238,7 @@
           <a:p>
             <a:fld id="{E9CC885B-4903-4D54-9A93-00025F12DED9}" type="datetimeFigureOut">
               <a:rPr kumimoji="1" lang="ja-JP" altLang="en-US" smtClean="0"/>
-              <a:t>2025/4/30</a:t>
+              <a:t>2025/5/2</a:t>
             </a:fld>
             <a:endParaRPr kumimoji="1" lang="ja-JP" altLang="en-US"/>
           </a:p>
@@ -1567,7 +1567,7 @@
           <a:p>
             <a:fld id="{E9CC885B-4903-4D54-9A93-00025F12DED9}" type="datetimeFigureOut">
               <a:rPr kumimoji="1" lang="ja-JP" altLang="en-US" smtClean="0"/>
-              <a:t>2025/4/30</a:t>
+              <a:t>2025/5/2</a:t>
             </a:fld>
             <a:endParaRPr kumimoji="1" lang="ja-JP" altLang="en-US"/>
           </a:p>
@@ -2043,7 +2043,7 @@
           <a:p>
             <a:fld id="{E9CC885B-4903-4D54-9A93-00025F12DED9}" type="datetimeFigureOut">
               <a:rPr kumimoji="1" lang="ja-JP" altLang="en-US" smtClean="0"/>
-              <a:t>2025/4/30</a:t>
+              <a:t>2025/5/2</a:t>
             </a:fld>
             <a:endParaRPr kumimoji="1" lang="ja-JP" altLang="en-US"/>
           </a:p>
@@ -2184,7 +2184,7 @@
           <a:p>
             <a:fld id="{E9CC885B-4903-4D54-9A93-00025F12DED9}" type="datetimeFigureOut">
               <a:rPr kumimoji="1" lang="ja-JP" altLang="en-US" smtClean="0"/>
-              <a:t>2025/4/30</a:t>
+              <a:t>2025/5/2</a:t>
             </a:fld>
             <a:endParaRPr kumimoji="1" lang="ja-JP" altLang="en-US"/>
           </a:p>
@@ -2297,7 +2297,7 @@
           <a:p>
             <a:fld id="{E9CC885B-4903-4D54-9A93-00025F12DED9}" type="datetimeFigureOut">
               <a:rPr kumimoji="1" lang="ja-JP" altLang="en-US" smtClean="0"/>
-              <a:t>2025/4/30</a:t>
+              <a:t>2025/5/2</a:t>
             </a:fld>
             <a:endParaRPr kumimoji="1" lang="ja-JP" altLang="en-US"/>
           </a:p>
@@ -2640,7 +2640,7 @@
           <a:p>
             <a:fld id="{E9CC885B-4903-4D54-9A93-00025F12DED9}" type="datetimeFigureOut">
               <a:rPr kumimoji="1" lang="ja-JP" altLang="en-US" smtClean="0"/>
-              <a:t>2025/4/30</a:t>
+              <a:t>2025/5/2</a:t>
             </a:fld>
             <a:endParaRPr kumimoji="1" lang="ja-JP" altLang="en-US"/>
           </a:p>
@@ -2928,7 +2928,7 @@
           <a:p>
             <a:fld id="{E9CC885B-4903-4D54-9A93-00025F12DED9}" type="datetimeFigureOut">
               <a:rPr kumimoji="1" lang="ja-JP" altLang="en-US" smtClean="0"/>
-              <a:t>2025/4/30</a:t>
+              <a:t>2025/5/2</a:t>
             </a:fld>
             <a:endParaRPr kumimoji="1" lang="ja-JP" altLang="en-US"/>
           </a:p>
@@ -3201,7 +3201,7 @@
           <a:p>
             <a:fld id="{E9CC885B-4903-4D54-9A93-00025F12DED9}" type="datetimeFigureOut">
               <a:rPr kumimoji="1" lang="ja-JP" altLang="en-US" smtClean="0"/>
-              <a:t>2025/4/30</a:t>
+              <a:t>2025/5/2</a:t>
             </a:fld>
             <a:endParaRPr kumimoji="1" lang="ja-JP" altLang="en-US"/>
           </a:p>
@@ -4081,7 +4081,7 @@
         <p:spPr>
           <a:xfrm>
             <a:off x="567542" y="1216429"/>
-            <a:ext cx="6141425" cy="1569660"/>
+            <a:ext cx="5557932" cy="1569660"/>
           </a:xfrm>
           <a:prstGeom prst="rect">
             <a:avLst/>
@@ -4099,7 +4099,7 @@
                 <a:latin typeface="HGP創英角ｺﾞｼｯｸUB" panose="020B0900000000000000" pitchFamily="50" charset="-128"/>
                 <a:ea typeface="HGP創英角ｺﾞｼｯｸUB" panose="020B0900000000000000" pitchFamily="50" charset="-128"/>
               </a:rPr>
-              <a:t>必ず以下のものを必ず企画書に書いてください</a:t>
+              <a:t>以下のものを必ず企画書に書いてください</a:t>
             </a:r>
             <a:endParaRPr lang="en-US" altLang="ja-JP" sz="2400" dirty="0">
               <a:latin typeface="HGP創英角ｺﾞｼｯｸUB" panose="020B0900000000000000" pitchFamily="50" charset="-128"/>
